--- a/docs/GotIt-Pitch-Deck.pptx
+++ b/docs/GotIt-Pitch-Deck.pptx
@@ -3433,8 +3433,8 @@
         </p:blipFill>
         <p:spPr>
           <a:xfrm>
-            <a:off x="6547457" y="685800"/>
-            <a:ext cx="3272845" cy="5120640"/>
+            <a:off x="4892040" y="685800"/>
+            <a:ext cx="6583680" cy="4572000"/>
           </a:xfrm>
           <a:prstGeom prst="rect">
             <a:avLst/>
@@ -3449,8 +3449,8 @@
         </p:nvSpPr>
         <p:spPr>
           <a:xfrm>
-            <a:off x="6547457" y="685800"/>
-            <a:ext cx="3272845" cy="5120640"/>
+            <a:off x="4892040" y="685800"/>
+            <a:ext cx="6583680" cy="4572000"/>
           </a:xfrm>
           <a:prstGeom prst="rect">
             <a:avLst/>
@@ -3493,8 +3493,8 @@
         </p:nvSpPr>
         <p:spPr>
           <a:xfrm>
-            <a:off x="6547457" y="5879592"/>
-            <a:ext cx="3272845" cy="228600"/>
+            <a:off x="4892040" y="5330952"/>
+            <a:ext cx="6583680" cy="228600"/>
           </a:xfrm>
           <a:prstGeom prst="rect">
             <a:avLst/>
@@ -8959,8 +8959,8 @@
         </p:blipFill>
         <p:spPr>
           <a:xfrm>
-            <a:off x="1645920" y="3794760"/>
-            <a:ext cx="3657600" cy="2286000"/>
+            <a:off x="1889055" y="3794760"/>
+            <a:ext cx="3171329" cy="2286000"/>
           </a:xfrm>
           <a:prstGeom prst="rect">
             <a:avLst/>
@@ -8975,8 +8975,8 @@
         </p:nvSpPr>
         <p:spPr>
           <a:xfrm>
-            <a:off x="1645920" y="3794760"/>
-            <a:ext cx="3657600" cy="2286000"/>
+            <a:off x="1889055" y="3794760"/>
+            <a:ext cx="3171329" cy="2286000"/>
           </a:xfrm>
           <a:prstGeom prst="rect">
             <a:avLst/>
@@ -9019,8 +9019,8 @@
         </p:nvSpPr>
         <p:spPr>
           <a:xfrm>
-            <a:off x="1645920" y="6153912"/>
-            <a:ext cx="3657600" cy="228600"/>
+            <a:off x="1889055" y="6153912"/>
+            <a:ext cx="3171329" cy="228600"/>
           </a:xfrm>
           <a:prstGeom prst="rect">
             <a:avLst/>
